--- a/apresentacao/ModaCRM-AI.pptx
+++ b/apresentacao/ModaCRM-AI.pptx
@@ -11472,7 +11472,7 @@
                 </a:solidFill>
                 <a:latin typeface="Segoe UI"/>
               </a:rPr>
-              <a:t>forma de recebimento · produto/moda · estoquista+entradas · transferências (radar de extravio) · gestão de estoquistas.</a:t>
+              <a:t>forma de recebimento · produto/moda · gestor de estoque+entradas · transferências (radar de extravio) · gestão de gestores de estoque.</a:t>
             </a:r>
           </a:p>
         </p:txBody>
@@ -12639,7 +12639,7 @@
                 </a:solidFill>
                 <a:latin typeface="Segoe UI"/>
               </a:rPr>
-              <a:t>Estoquista · rede</a:t>
+              <a:t>Gestor de Estoque · rede</a:t>
             </a:r>
           </a:p>
         </p:txBody>
